--- a/tobi/background.pptx
+++ b/tobi/background.pptx
@@ -261,7 +261,7 @@
           <a:p>
             <a:fld id="{34C9355B-4D3E-A641-9B89-3A2977395903}" type="datetimeFigureOut">
               <a:rPr lang="en-AU" smtClean="0"/>
-              <a:t>22/5/2026</a:t>
+              <a:t>25/5/2026</a:t>
             </a:fld>
             <a:endParaRPr lang="en-AU"/>
           </a:p>
@@ -461,7 +461,7 @@
           <a:p>
             <a:fld id="{34C9355B-4D3E-A641-9B89-3A2977395903}" type="datetimeFigureOut">
               <a:rPr lang="en-AU" smtClean="0"/>
-              <a:t>22/5/2026</a:t>
+              <a:t>25/5/2026</a:t>
             </a:fld>
             <a:endParaRPr lang="en-AU"/>
           </a:p>
@@ -671,7 +671,7 @@
           <a:p>
             <a:fld id="{34C9355B-4D3E-A641-9B89-3A2977395903}" type="datetimeFigureOut">
               <a:rPr lang="en-AU" smtClean="0"/>
-              <a:t>22/5/2026</a:t>
+              <a:t>25/5/2026</a:t>
             </a:fld>
             <a:endParaRPr lang="en-AU"/>
           </a:p>
@@ -871,7 +871,7 @@
           <a:p>
             <a:fld id="{34C9355B-4D3E-A641-9B89-3A2977395903}" type="datetimeFigureOut">
               <a:rPr lang="en-AU" smtClean="0"/>
-              <a:t>22/5/2026</a:t>
+              <a:t>25/5/2026</a:t>
             </a:fld>
             <a:endParaRPr lang="en-AU"/>
           </a:p>
@@ -1147,7 +1147,7 @@
           <a:p>
             <a:fld id="{34C9355B-4D3E-A641-9B89-3A2977395903}" type="datetimeFigureOut">
               <a:rPr lang="en-AU" smtClean="0"/>
-              <a:t>22/5/2026</a:t>
+              <a:t>25/5/2026</a:t>
             </a:fld>
             <a:endParaRPr lang="en-AU"/>
           </a:p>
@@ -1415,7 +1415,7 @@
           <a:p>
             <a:fld id="{34C9355B-4D3E-A641-9B89-3A2977395903}" type="datetimeFigureOut">
               <a:rPr lang="en-AU" smtClean="0"/>
-              <a:t>22/5/2026</a:t>
+              <a:t>25/5/2026</a:t>
             </a:fld>
             <a:endParaRPr lang="en-AU"/>
           </a:p>
@@ -1830,7 +1830,7 @@
           <a:p>
             <a:fld id="{34C9355B-4D3E-A641-9B89-3A2977395903}" type="datetimeFigureOut">
               <a:rPr lang="en-AU" smtClean="0"/>
-              <a:t>22/5/2026</a:t>
+              <a:t>25/5/2026</a:t>
             </a:fld>
             <a:endParaRPr lang="en-AU"/>
           </a:p>
@@ -1972,7 +1972,7 @@
           <a:p>
             <a:fld id="{34C9355B-4D3E-A641-9B89-3A2977395903}" type="datetimeFigureOut">
               <a:rPr lang="en-AU" smtClean="0"/>
-              <a:t>22/5/2026</a:t>
+              <a:t>25/5/2026</a:t>
             </a:fld>
             <a:endParaRPr lang="en-AU"/>
           </a:p>
@@ -2085,7 +2085,7 @@
           <a:p>
             <a:fld id="{34C9355B-4D3E-A641-9B89-3A2977395903}" type="datetimeFigureOut">
               <a:rPr lang="en-AU" smtClean="0"/>
-              <a:t>22/5/2026</a:t>
+              <a:t>25/5/2026</a:t>
             </a:fld>
             <a:endParaRPr lang="en-AU"/>
           </a:p>
@@ -2398,7 +2398,7 @@
           <a:p>
             <a:fld id="{34C9355B-4D3E-A641-9B89-3A2977395903}" type="datetimeFigureOut">
               <a:rPr lang="en-AU" smtClean="0"/>
-              <a:t>22/5/2026</a:t>
+              <a:t>25/5/2026</a:t>
             </a:fld>
             <a:endParaRPr lang="en-AU"/>
           </a:p>
@@ -2687,7 +2687,7 @@
           <a:p>
             <a:fld id="{34C9355B-4D3E-A641-9B89-3A2977395903}" type="datetimeFigureOut">
               <a:rPr lang="en-AU" smtClean="0"/>
-              <a:t>22/5/2026</a:t>
+              <a:t>25/5/2026</a:t>
             </a:fld>
             <a:endParaRPr lang="en-AU"/>
           </a:p>
@@ -2930,7 +2930,7 @@
           <a:p>
             <a:fld id="{34C9355B-4D3E-A641-9B89-3A2977395903}" type="datetimeFigureOut">
               <a:rPr lang="en-AU" smtClean="0"/>
-              <a:t>22/5/2026</a:t>
+              <a:t>25/5/2026</a:t>
             </a:fld>
             <a:endParaRPr lang="en-AU"/>
           </a:p>
@@ -3357,6 +3357,58 @@
       </p:grpSpPr>
       <p:sp>
         <p:nvSpPr>
+          <p:cNvPr id="7" name="Rectangle 6">
+            <a:extLst>
+              <a:ext uri="{FF2B5EF4-FFF2-40B4-BE49-F238E27FC236}">
+                <a16:creationId xmlns:a16="http://schemas.microsoft.com/office/drawing/2014/main" id="{1D0A7F1A-8980-71B1-F3F5-F9AE312E4086}"/>
+              </a:ext>
+            </a:extLst>
+          </p:cNvPr>
+          <p:cNvSpPr/>
+          <p:nvPr/>
+        </p:nvSpPr>
+        <p:spPr>
+          <a:xfrm>
+            <a:off x="10236409" y="4624220"/>
+            <a:ext cx="1767296" cy="1767296"/>
+          </a:xfrm>
+          <a:prstGeom prst="rect">
+            <a:avLst/>
+          </a:prstGeom>
+          <a:solidFill>
+            <a:schemeClr val="bg1"/>
+          </a:solidFill>
+          <a:ln>
+            <a:noFill/>
+          </a:ln>
+        </p:spPr>
+        <p:style>
+          <a:lnRef idx="2">
+            <a:schemeClr val="accent1">
+              <a:shade val="15000"/>
+            </a:schemeClr>
+          </a:lnRef>
+          <a:fillRef idx="1">
+            <a:schemeClr val="accent1"/>
+          </a:fillRef>
+          <a:effectRef idx="0">
+            <a:schemeClr val="accent1"/>
+          </a:effectRef>
+          <a:fontRef idx="minor">
+            <a:schemeClr val="lt1"/>
+          </a:fontRef>
+        </p:style>
+        <p:txBody>
+          <a:bodyPr rtlCol="0" anchor="ctr"/>
+          <a:lstStyle/>
+          <a:p>
+            <a:pPr algn="ctr"/>
+            <a:endParaRPr lang="en-AU"/>
+          </a:p>
+        </p:txBody>
+      </p:sp>
+      <p:sp>
+        <p:nvSpPr>
           <p:cNvPr id="18" name="Rectangle 17">
             <a:extLst>
               <a:ext uri="{FF2B5EF4-FFF2-40B4-BE49-F238E27FC236}">
@@ -3463,6 +3515,147 @@
           <a:xfrm>
             <a:off x="10237469" y="1818460"/>
             <a:ext cx="1767296" cy="1767296"/>
+          </a:xfrm>
+          <a:prstGeom prst="rect">
+            <a:avLst/>
+          </a:prstGeom>
+        </p:spPr>
+      </p:pic>
+      <p:sp>
+        <p:nvSpPr>
+          <p:cNvPr id="3" name="TextBox 2">
+            <a:extLst>
+              <a:ext uri="{FF2B5EF4-FFF2-40B4-BE49-F238E27FC236}">
+                <a16:creationId xmlns:a16="http://schemas.microsoft.com/office/drawing/2014/main" id="{F58A1965-B013-26EB-EE5B-AF6E87F1FAE9}"/>
+              </a:ext>
+            </a:extLst>
+          </p:cNvPr>
+          <p:cNvSpPr txBox="1"/>
+          <p:nvPr/>
+        </p:nvSpPr>
+        <p:spPr>
+          <a:xfrm>
+            <a:off x="10236410" y="1097516"/>
+            <a:ext cx="1767295" cy="646331"/>
+          </a:xfrm>
+          <a:prstGeom prst="rect">
+            <a:avLst/>
+          </a:prstGeom>
+          <a:noFill/>
+        </p:spPr>
+        <p:txBody>
+          <a:bodyPr wrap="square" rtlCol="0">
+            <a:spAutoFit/>
+          </a:bodyPr>
+          <a:lstStyle/>
+          <a:p>
+            <a:pPr algn="ctr"/>
+            <a:r>
+              <a:rPr lang="en-AU" dirty="0">
+                <a:solidFill>
+                  <a:schemeClr val="bg1"/>
+                </a:solidFill>
+              </a:rPr>
+              <a:t>Code &amp; </a:t>
+            </a:r>
+            <a:br>
+              <a:rPr lang="en-AU" dirty="0">
+                <a:solidFill>
+                  <a:schemeClr val="bg1"/>
+                </a:solidFill>
+              </a:rPr>
+            </a:br>
+            <a:r>
+              <a:rPr lang="en-AU" dirty="0">
+                <a:solidFill>
+                  <a:schemeClr val="bg1"/>
+                </a:solidFill>
+              </a:rPr>
+              <a:t>Follow Along</a:t>
+            </a:r>
+          </a:p>
+        </p:txBody>
+      </p:sp>
+      <p:sp>
+        <p:nvSpPr>
+          <p:cNvPr id="4" name="TextBox 3">
+            <a:extLst>
+              <a:ext uri="{FF2B5EF4-FFF2-40B4-BE49-F238E27FC236}">
+                <a16:creationId xmlns:a16="http://schemas.microsoft.com/office/drawing/2014/main" id="{BA4F23A0-581B-9EAD-9189-45DA164F932D}"/>
+              </a:ext>
+            </a:extLst>
+          </p:cNvPr>
+          <p:cNvSpPr txBox="1"/>
+          <p:nvPr/>
+        </p:nvSpPr>
+        <p:spPr>
+          <a:xfrm>
+            <a:off x="10236409" y="3831385"/>
+            <a:ext cx="1767295" cy="646331"/>
+          </a:xfrm>
+          <a:prstGeom prst="rect">
+            <a:avLst/>
+          </a:prstGeom>
+          <a:noFill/>
+        </p:spPr>
+        <p:txBody>
+          <a:bodyPr wrap="square" rtlCol="0">
+            <a:spAutoFit/>
+          </a:bodyPr>
+          <a:lstStyle/>
+          <a:p>
+            <a:pPr algn="ctr"/>
+            <a:r>
+              <a:rPr lang="en-AU" dirty="0">
+                <a:solidFill>
+                  <a:schemeClr val="bg1"/>
+                </a:solidFill>
+              </a:rPr>
+              <a:t>Questions (</a:t>
+            </a:r>
+            <a:r>
+              <a:rPr lang="en-AU" dirty="0" err="1">
+                <a:solidFill>
+                  <a:schemeClr val="bg1"/>
+                </a:solidFill>
+              </a:rPr>
+              <a:t>Mentimeter</a:t>
+            </a:r>
+            <a:r>
+              <a:rPr lang="en-AU" dirty="0">
+                <a:solidFill>
+                  <a:schemeClr val="bg1"/>
+                </a:solidFill>
+              </a:rPr>
+              <a:t>)</a:t>
+            </a:r>
+          </a:p>
+        </p:txBody>
+      </p:sp>
+      <p:pic>
+        <p:nvPicPr>
+          <p:cNvPr id="6" name="Picture 5">
+            <a:extLst>
+              <a:ext uri="{FF2B5EF4-FFF2-40B4-BE49-F238E27FC236}">
+                <a16:creationId xmlns:a16="http://schemas.microsoft.com/office/drawing/2014/main" id="{C2419CCB-B9EC-A024-5ED2-28A97CF1D9A5}"/>
+              </a:ext>
+            </a:extLst>
+          </p:cNvPr>
+          <p:cNvPicPr>
+            <a:picLocks noChangeAspect="1"/>
+          </p:cNvPicPr>
+          <p:nvPr/>
+        </p:nvPicPr>
+        <p:blipFill>
+          <a:blip r:embed="rId4"/>
+          <a:stretch>
+            <a:fillRect/>
+          </a:stretch>
+        </p:blipFill>
+        <p:spPr>
+          <a:xfrm>
+            <a:off x="10317108" y="4704920"/>
+            <a:ext cx="1605896" cy="1605896"/>
           </a:xfrm>
           <a:prstGeom prst="rect">
             <a:avLst/>

--- a/tobi/background.pptx
+++ b/tobi/background.pptx
@@ -261,7 +261,7 @@
           <a:p>
             <a:fld id="{34C9355B-4D3E-A641-9B89-3A2977395903}" type="datetimeFigureOut">
               <a:rPr lang="en-AU" smtClean="0"/>
-              <a:t>25/5/2026</a:t>
+              <a:t>28/5/2026</a:t>
             </a:fld>
             <a:endParaRPr lang="en-AU"/>
           </a:p>
@@ -461,7 +461,7 @@
           <a:p>
             <a:fld id="{34C9355B-4D3E-A641-9B89-3A2977395903}" type="datetimeFigureOut">
               <a:rPr lang="en-AU" smtClean="0"/>
-              <a:t>25/5/2026</a:t>
+              <a:t>28/5/2026</a:t>
             </a:fld>
             <a:endParaRPr lang="en-AU"/>
           </a:p>
@@ -671,7 +671,7 @@
           <a:p>
             <a:fld id="{34C9355B-4D3E-A641-9B89-3A2977395903}" type="datetimeFigureOut">
               <a:rPr lang="en-AU" smtClean="0"/>
-              <a:t>25/5/2026</a:t>
+              <a:t>28/5/2026</a:t>
             </a:fld>
             <a:endParaRPr lang="en-AU"/>
           </a:p>
@@ -871,7 +871,7 @@
           <a:p>
             <a:fld id="{34C9355B-4D3E-A641-9B89-3A2977395903}" type="datetimeFigureOut">
               <a:rPr lang="en-AU" smtClean="0"/>
-              <a:t>25/5/2026</a:t>
+              <a:t>28/5/2026</a:t>
             </a:fld>
             <a:endParaRPr lang="en-AU"/>
           </a:p>
@@ -1147,7 +1147,7 @@
           <a:p>
             <a:fld id="{34C9355B-4D3E-A641-9B89-3A2977395903}" type="datetimeFigureOut">
               <a:rPr lang="en-AU" smtClean="0"/>
-              <a:t>25/5/2026</a:t>
+              <a:t>28/5/2026</a:t>
             </a:fld>
             <a:endParaRPr lang="en-AU"/>
           </a:p>
@@ -1415,7 +1415,7 @@
           <a:p>
             <a:fld id="{34C9355B-4D3E-A641-9B89-3A2977395903}" type="datetimeFigureOut">
               <a:rPr lang="en-AU" smtClean="0"/>
-              <a:t>25/5/2026</a:t>
+              <a:t>28/5/2026</a:t>
             </a:fld>
             <a:endParaRPr lang="en-AU"/>
           </a:p>
@@ -1830,7 +1830,7 @@
           <a:p>
             <a:fld id="{34C9355B-4D3E-A641-9B89-3A2977395903}" type="datetimeFigureOut">
               <a:rPr lang="en-AU" smtClean="0"/>
-              <a:t>25/5/2026</a:t>
+              <a:t>28/5/2026</a:t>
             </a:fld>
             <a:endParaRPr lang="en-AU"/>
           </a:p>
@@ -1972,7 +1972,7 @@
           <a:p>
             <a:fld id="{34C9355B-4D3E-A641-9B89-3A2977395903}" type="datetimeFigureOut">
               <a:rPr lang="en-AU" smtClean="0"/>
-              <a:t>25/5/2026</a:t>
+              <a:t>28/5/2026</a:t>
             </a:fld>
             <a:endParaRPr lang="en-AU"/>
           </a:p>
@@ -2085,7 +2085,7 @@
           <a:p>
             <a:fld id="{34C9355B-4D3E-A641-9B89-3A2977395903}" type="datetimeFigureOut">
               <a:rPr lang="en-AU" smtClean="0"/>
-              <a:t>25/5/2026</a:t>
+              <a:t>28/5/2026</a:t>
             </a:fld>
             <a:endParaRPr lang="en-AU"/>
           </a:p>
@@ -2398,7 +2398,7 @@
           <a:p>
             <a:fld id="{34C9355B-4D3E-A641-9B89-3A2977395903}" type="datetimeFigureOut">
               <a:rPr lang="en-AU" smtClean="0"/>
-              <a:t>25/5/2026</a:t>
+              <a:t>28/5/2026</a:t>
             </a:fld>
             <a:endParaRPr lang="en-AU"/>
           </a:p>
@@ -2687,7 +2687,7 @@
           <a:p>
             <a:fld id="{34C9355B-4D3E-A641-9B89-3A2977395903}" type="datetimeFigureOut">
               <a:rPr lang="en-AU" smtClean="0"/>
-              <a:t>25/5/2026</a:t>
+              <a:t>28/5/2026</a:t>
             </a:fld>
             <a:endParaRPr lang="en-AU"/>
           </a:p>
@@ -2930,7 +2930,7 @@
           <a:p>
             <a:fld id="{34C9355B-4D3E-A641-9B89-3A2977395903}" type="datetimeFigureOut">
               <a:rPr lang="en-AU" smtClean="0"/>
-              <a:t>25/5/2026</a:t>
+              <a:t>28/5/2026</a:t>
             </a:fld>
             <a:endParaRPr lang="en-AU"/>
           </a:p>
@@ -3369,7 +3369,7 @@
         </p:nvSpPr>
         <p:spPr>
           <a:xfrm>
-            <a:off x="10236409" y="4624220"/>
+            <a:off x="10236409" y="4792170"/>
             <a:ext cx="1767296" cy="1767296"/>
           </a:xfrm>
           <a:prstGeom prst="rect">
@@ -3513,7 +3513,7 @@
         </p:blipFill>
         <p:spPr>
           <a:xfrm>
-            <a:off x="10237469" y="1818460"/>
+            <a:off x="10237469" y="1563426"/>
             <a:ext cx="1767296" cy="1767296"/>
           </a:xfrm>
           <a:prstGeom prst="rect">
@@ -3535,7 +3535,7 @@
         </p:nvSpPr>
         <p:spPr>
           <a:xfrm>
-            <a:off x="10236410" y="1097516"/>
+            <a:off x="10236410" y="935788"/>
             <a:ext cx="1767295" cy="646331"/>
           </a:xfrm>
           <a:prstGeom prst="rect">
@@ -3590,7 +3590,7 @@
         </p:nvSpPr>
         <p:spPr>
           <a:xfrm>
-            <a:off x="10236409" y="3831385"/>
+            <a:off x="10236409" y="4092637"/>
             <a:ext cx="1767295" cy="646331"/>
           </a:xfrm>
           <a:prstGeom prst="rect">
@@ -3654,7 +3654,7 @@
         </p:blipFill>
         <p:spPr>
           <a:xfrm>
-            <a:off x="10317108" y="4704920"/>
+            <a:off x="10317108" y="4872870"/>
             <a:ext cx="1605896" cy="1605896"/>
           </a:xfrm>
           <a:prstGeom prst="rect">
@@ -3662,6 +3662,62 @@
           </a:prstGeom>
         </p:spPr>
       </p:pic>
+      <p:sp>
+        <p:nvSpPr>
+          <p:cNvPr id="5" name="TextBox 4">
+            <a:extLst>
+              <a:ext uri="{FF2B5EF4-FFF2-40B4-BE49-F238E27FC236}">
+                <a16:creationId xmlns:a16="http://schemas.microsoft.com/office/drawing/2014/main" id="{D4FEAD17-A6D1-0FD9-216B-536CD5EA169C}"/>
+              </a:ext>
+            </a:extLst>
+          </p:cNvPr>
+          <p:cNvSpPr txBox="1"/>
+          <p:nvPr/>
+        </p:nvSpPr>
+        <p:spPr>
+          <a:xfrm>
+            <a:off x="10044671" y="3305451"/>
+            <a:ext cx="2147329" cy="646331"/>
+          </a:xfrm>
+          <a:prstGeom prst="rect">
+            <a:avLst/>
+          </a:prstGeom>
+          <a:noFill/>
+        </p:spPr>
+        <p:txBody>
+          <a:bodyPr wrap="square">
+            <a:spAutoFit/>
+          </a:bodyPr>
+          <a:lstStyle/>
+          <a:p>
+            <a:pPr algn="ctr"/>
+            <a:r>
+              <a:rPr lang="en-AU" dirty="0">
+                <a:solidFill>
+                  <a:schemeClr val="bg1"/>
+                </a:solidFill>
+              </a:rPr>
+              <a:t>https://</a:t>
+            </a:r>
+            <a:r>
+              <a:rPr lang="en-AU" dirty="0" err="1">
+                <a:solidFill>
+                  <a:schemeClr val="bg1"/>
+                </a:solidFill>
+              </a:rPr>
+              <a:t>tinyurl.com</a:t>
+            </a:r>
+            <a:r>
+              <a:rPr lang="en-AU" dirty="0">
+                <a:solidFill>
+                  <a:schemeClr val="bg1"/>
+                </a:solidFill>
+              </a:rPr>
+              <a:t>/ICRA26-KT4</a:t>
+            </a:r>
+          </a:p>
+        </p:txBody>
+      </p:sp>
     </p:spTree>
     <p:extLst>
       <p:ext uri="{BB962C8B-B14F-4D97-AF65-F5344CB8AC3E}">

--- a/tobi/background.pptx
+++ b/tobi/background.pptx
@@ -261,7 +261,7 @@
           <a:p>
             <a:fld id="{34C9355B-4D3E-A641-9B89-3A2977395903}" type="datetimeFigureOut">
               <a:rPr lang="en-AU" smtClean="0"/>
-              <a:t>28/5/2026</a:t>
+              <a:t>3/6/2026</a:t>
             </a:fld>
             <a:endParaRPr lang="en-AU"/>
           </a:p>
@@ -461,7 +461,7 @@
           <a:p>
             <a:fld id="{34C9355B-4D3E-A641-9B89-3A2977395903}" type="datetimeFigureOut">
               <a:rPr lang="en-AU" smtClean="0"/>
-              <a:t>28/5/2026</a:t>
+              <a:t>3/6/2026</a:t>
             </a:fld>
             <a:endParaRPr lang="en-AU"/>
           </a:p>
@@ -671,7 +671,7 @@
           <a:p>
             <a:fld id="{34C9355B-4D3E-A641-9B89-3A2977395903}" type="datetimeFigureOut">
               <a:rPr lang="en-AU" smtClean="0"/>
-              <a:t>28/5/2026</a:t>
+              <a:t>3/6/2026</a:t>
             </a:fld>
             <a:endParaRPr lang="en-AU"/>
           </a:p>
@@ -871,7 +871,7 @@
           <a:p>
             <a:fld id="{34C9355B-4D3E-A641-9B89-3A2977395903}" type="datetimeFigureOut">
               <a:rPr lang="en-AU" smtClean="0"/>
-              <a:t>28/5/2026</a:t>
+              <a:t>3/6/2026</a:t>
             </a:fld>
             <a:endParaRPr lang="en-AU"/>
           </a:p>
@@ -1147,7 +1147,7 @@
           <a:p>
             <a:fld id="{34C9355B-4D3E-A641-9B89-3A2977395903}" type="datetimeFigureOut">
               <a:rPr lang="en-AU" smtClean="0"/>
-              <a:t>28/5/2026</a:t>
+              <a:t>3/6/2026</a:t>
             </a:fld>
             <a:endParaRPr lang="en-AU"/>
           </a:p>
@@ -1415,7 +1415,7 @@
           <a:p>
             <a:fld id="{34C9355B-4D3E-A641-9B89-3A2977395903}" type="datetimeFigureOut">
               <a:rPr lang="en-AU" smtClean="0"/>
-              <a:t>28/5/2026</a:t>
+              <a:t>3/6/2026</a:t>
             </a:fld>
             <a:endParaRPr lang="en-AU"/>
           </a:p>
@@ -1830,7 +1830,7 @@
           <a:p>
             <a:fld id="{34C9355B-4D3E-A641-9B89-3A2977395903}" type="datetimeFigureOut">
               <a:rPr lang="en-AU" smtClean="0"/>
-              <a:t>28/5/2026</a:t>
+              <a:t>3/6/2026</a:t>
             </a:fld>
             <a:endParaRPr lang="en-AU"/>
           </a:p>
@@ -1972,7 +1972,7 @@
           <a:p>
             <a:fld id="{34C9355B-4D3E-A641-9B89-3A2977395903}" type="datetimeFigureOut">
               <a:rPr lang="en-AU" smtClean="0"/>
-              <a:t>28/5/2026</a:t>
+              <a:t>3/6/2026</a:t>
             </a:fld>
             <a:endParaRPr lang="en-AU"/>
           </a:p>
@@ -2085,7 +2085,7 @@
           <a:p>
             <a:fld id="{34C9355B-4D3E-A641-9B89-3A2977395903}" type="datetimeFigureOut">
               <a:rPr lang="en-AU" smtClean="0"/>
-              <a:t>28/5/2026</a:t>
+              <a:t>3/6/2026</a:t>
             </a:fld>
             <a:endParaRPr lang="en-AU"/>
           </a:p>
@@ -2398,7 +2398,7 @@
           <a:p>
             <a:fld id="{34C9355B-4D3E-A641-9B89-3A2977395903}" type="datetimeFigureOut">
               <a:rPr lang="en-AU" smtClean="0"/>
-              <a:t>28/5/2026</a:t>
+              <a:t>3/6/2026</a:t>
             </a:fld>
             <a:endParaRPr lang="en-AU"/>
           </a:p>
@@ -2687,7 +2687,7 @@
           <a:p>
             <a:fld id="{34C9355B-4D3E-A641-9B89-3A2977395903}" type="datetimeFigureOut">
               <a:rPr lang="en-AU" smtClean="0"/>
-              <a:t>28/5/2026</a:t>
+              <a:t>3/6/2026</a:t>
             </a:fld>
             <a:endParaRPr lang="en-AU"/>
           </a:p>
@@ -2930,7 +2930,7 @@
           <a:p>
             <a:fld id="{34C9355B-4D3E-A641-9B89-3A2977395903}" type="datetimeFigureOut">
               <a:rPr lang="en-AU" smtClean="0"/>
-              <a:t>28/5/2026</a:t>
+              <a:t>3/6/2026</a:t>
             </a:fld>
             <a:endParaRPr lang="en-AU"/>
           </a:p>
@@ -3632,36 +3632,6 @@
           </a:p>
         </p:txBody>
       </p:sp>
-      <p:pic>
-        <p:nvPicPr>
-          <p:cNvPr id="6" name="Picture 5">
-            <a:extLst>
-              <a:ext uri="{FF2B5EF4-FFF2-40B4-BE49-F238E27FC236}">
-                <a16:creationId xmlns:a16="http://schemas.microsoft.com/office/drawing/2014/main" id="{C2419CCB-B9EC-A024-5ED2-28A97CF1D9A5}"/>
-              </a:ext>
-            </a:extLst>
-          </p:cNvPr>
-          <p:cNvPicPr>
-            <a:picLocks noChangeAspect="1"/>
-          </p:cNvPicPr>
-          <p:nvPr/>
-        </p:nvPicPr>
-        <p:blipFill>
-          <a:blip r:embed="rId4"/>
-          <a:stretch>
-            <a:fillRect/>
-          </a:stretch>
-        </p:blipFill>
-        <p:spPr>
-          <a:xfrm>
-            <a:off x="10317108" y="4872870"/>
-            <a:ext cx="1605896" cy="1605896"/>
-          </a:xfrm>
-          <a:prstGeom prst="rect">
-            <a:avLst/>
-          </a:prstGeom>
-        </p:spPr>
-      </p:pic>
       <p:sp>
         <p:nvSpPr>
           <p:cNvPr id="5" name="TextBox 4">
@@ -3713,11 +3683,58 @@
                   <a:schemeClr val="bg1"/>
                 </a:solidFill>
               </a:rPr>
-              <a:t>/ICRA26-KT4</a:t>
-            </a:r>
-          </a:p>
-        </p:txBody>
-      </p:sp>
+              <a:t>/ICRA26-KT3</a:t>
+            </a:r>
+          </a:p>
+        </p:txBody>
+      </p:sp>
+      <p:pic>
+        <p:nvPicPr>
+          <p:cNvPr id="1026" name="Picture 2">
+            <a:extLst>
+              <a:ext uri="{FF2B5EF4-FFF2-40B4-BE49-F238E27FC236}">
+                <a16:creationId xmlns:a16="http://schemas.microsoft.com/office/drawing/2014/main" id="{458D057C-6DD4-D87E-C0D7-03214D9F4389}"/>
+              </a:ext>
+            </a:extLst>
+          </p:cNvPr>
+          <p:cNvPicPr>
+            <a:picLocks noChangeAspect="1" noChangeArrowheads="1"/>
+          </p:cNvPicPr>
+          <p:nvPr/>
+        </p:nvPicPr>
+        <p:blipFill>
+          <a:blip r:embed="rId4">
+            <a:extLst>
+              <a:ext uri="{28A0092B-C50C-407E-A947-70E740481C1C}">
+                <a14:useLocalDpi xmlns:a14="http://schemas.microsoft.com/office/drawing/2010/main" val="0"/>
+              </a:ext>
+            </a:extLst>
+          </a:blip>
+          <a:srcRect/>
+          <a:stretch>
+            <a:fillRect/>
+          </a:stretch>
+        </p:blipFill>
+        <p:spPr bwMode="auto">
+          <a:xfrm>
+            <a:off x="10317107" y="4864705"/>
+            <a:ext cx="1618503" cy="1618503"/>
+          </a:xfrm>
+          <a:prstGeom prst="rect">
+            <a:avLst/>
+          </a:prstGeom>
+          <a:noFill/>
+          <a:extLst>
+            <a:ext uri="{909E8E84-426E-40DD-AFC4-6F175D3DCCD1}">
+              <a14:hiddenFill xmlns:a14="http://schemas.microsoft.com/office/drawing/2010/main">
+                <a:solidFill>
+                  <a:srgbClr val="FFFFFF"/>
+                </a:solidFill>
+              </a14:hiddenFill>
+            </a:ext>
+          </a:extLst>
+        </p:spPr>
+      </p:pic>
     </p:spTree>
     <p:extLst>
       <p:ext uri="{BB962C8B-B14F-4D97-AF65-F5344CB8AC3E}">
